--- a/ProjectPPT.pptx
+++ b/ProjectPPT.pptx
@@ -235,7 +235,7 @@
             <a:fld id="{25D2B5EB-424D-4C39-A8AB-65F1D7895EF3}" type="datetimeFigureOut">
               <a:rPr lang="en-US" smtClean="0"/>
               <a:pPr/>
-              <a:t>4/28/2026</a:t>
+              <a:t>5/7/2026</a:t>
             </a:fld>
             <a:endParaRPr lang="en-US"/>
           </a:p>
@@ -418,7 +418,7 @@
             <a:fld id="{888BC1CF-45D5-4DEE-AAB8-8C5341844FC9}" type="datetimeFigureOut">
               <a:rPr lang="en-US" smtClean="0"/>
               <a:pPr/>
-              <a:t>4/28/2026</a:t>
+              <a:t>5/7/2026</a:t>
             </a:fld>
             <a:endParaRPr lang="en-US"/>
           </a:p>
@@ -2381,6 +2381,13 @@
           </a:effectRef>
           <a:fontRef idx="minor"/>
         </p:style>
+        <p:txBody>
+          <a:bodyPr/>
+          <a:lstStyle/>
+          <a:p>
+            <a:endParaRPr lang="en-US"/>
+          </a:p>
+        </p:txBody>
       </p:sp>
       <p:sp>
         <p:nvSpPr>
@@ -2420,6 +2427,13 @@
           </a:effectRef>
           <a:fontRef idx="minor"/>
         </p:style>
+        <p:txBody>
+          <a:bodyPr/>
+          <a:lstStyle/>
+          <a:p>
+            <a:endParaRPr lang="en-US"/>
+          </a:p>
+        </p:txBody>
       </p:sp>
       <p:pic>
         <p:nvPicPr>
@@ -2516,6 +2530,13 @@
             </a:effectRef>
             <a:fontRef idx="minor"/>
           </p:style>
+          <p:txBody>
+            <a:bodyPr/>
+            <a:lstStyle/>
+            <a:p>
+              <a:endParaRPr lang="en-US"/>
+            </a:p>
+          </p:txBody>
         </p:sp>
         <p:pic>
           <p:nvPicPr>
@@ -2576,6 +2597,13 @@
             </a:effectRef>
             <a:fontRef idx="minor"/>
           </p:style>
+          <p:txBody>
+            <a:bodyPr/>
+            <a:lstStyle/>
+            <a:p>
+              <a:endParaRPr lang="en-US"/>
+            </a:p>
+          </p:txBody>
         </p:sp>
       </p:grpSp>
       <p:pic>
@@ -2672,6 +2700,13 @@
             </a:effectRef>
             <a:fontRef idx="minor"/>
           </p:style>
+          <p:txBody>
+            <a:bodyPr/>
+            <a:lstStyle/>
+            <a:p>
+              <a:endParaRPr lang="en-US"/>
+            </a:p>
+          </p:txBody>
         </p:sp>
         <p:pic>
           <p:nvPicPr>
@@ -2732,6 +2767,13 @@
             </a:effectRef>
             <a:fontRef idx="minor"/>
           </p:style>
+          <p:txBody>
+            <a:bodyPr/>
+            <a:lstStyle/>
+            <a:p>
+              <a:endParaRPr lang="en-US"/>
+            </a:p>
+          </p:txBody>
         </p:sp>
       </p:grpSp>
       <p:pic>
@@ -3496,12 +3538,12 @@
               </a:spcBef>
             </a:pPr>
             <a:r>
-              <a:rPr lang="en-US" sz="4800" i="1" spc="-1" dirty="0">
+              <a:rPr lang="en-US" sz="4000" i="1" spc="-1" dirty="0">
                 <a:latin typeface="Times New Roman" panose="02020603050405020304" pitchFamily="18" charset="0"/>
                 <a:ea typeface="Calibri" panose="020F0502020204030204" pitchFamily="34" charset="0"/>
                 <a:cs typeface="Times New Roman" panose="02020603050405020304" pitchFamily="18" charset="0"/>
               </a:rPr>
-              <a:t>Chirp</a:t>
+              <a:t>Chirp – A Real-Time Social Media Interaction Platform</a:t>
             </a:r>
             <a:endParaRPr lang="en-US" sz="2000" i="1" spc="-1" dirty="0">
               <a:latin typeface="Times New Roman" panose="02020603050405020304" pitchFamily="18" charset="0"/>
@@ -3641,14 +3683,10 @@
             </a:pPr>
             <a:r>
               <a:rPr lang="en-IN" dirty="0"/>
-              <a:t>Dr. Shikha </a:t>
-            </a:r>
-            <a:r>
-              <a:rPr lang="en-IN"/>
-              <a:t>Tuteja</a:t>
-            </a:r>
-            <a:r>
-              <a:rPr lang="en-IN" b="1"/>
+              <a:t>Dr. Shikha Tuteja</a:t>
+            </a:r>
+            <a:r>
+              <a:rPr lang="en-IN" b="1" dirty="0"/>
               <a:t> </a:t>
             </a:r>
             <a:endParaRPr lang="en-US" sz="2000" spc="-1" dirty="0">
@@ -3793,7 +3831,7 @@
         </p:nvSpPr>
         <p:spPr>
           <a:xfrm>
-            <a:off x="0" y="150828"/>
+            <a:off x="0" y="79708"/>
             <a:ext cx="5486040" cy="763211"/>
           </a:xfrm>
         </p:spPr>
@@ -3801,7 +3839,6 @@
           <a:bodyPr/>
           <a:lstStyle/>
           <a:p>
-            <a:pPr algn="ctr"/>
             <a:r>
               <a:rPr lang="en-US" altLang="en-US" sz="3200" dirty="0">
                 <a:latin typeface="Times New Roman" panose="02020603050405020304" pitchFamily="18" charset="0"/>
@@ -3809,7 +3846,7 @@
                 <a:cs typeface="Times New Roman" panose="02020603050405020304" pitchFamily="18" charset="0"/>
                 <a:sym typeface="Times Roman"/>
               </a:rPr>
-              <a:t>Future Improvements</a:t>
+              <a:t>  Future Improvements</a:t>
             </a:r>
             <a:endParaRPr lang="en-US" sz="3200" dirty="0">
               <a:latin typeface="Times New Roman" panose="02020603050405020304" pitchFamily="18" charset="0"/>
@@ -3844,78 +3881,194 @@
           <a:bodyPr/>
           <a:lstStyle/>
           <a:p>
+            <a:pPr marL="457200" indent="-317500">
+              <a:lnSpc>
+                <a:spcPct val="100000"/>
+              </a:lnSpc>
+              <a:buClr>
+                <a:srgbClr val="000000"/>
+              </a:buClr>
+              <a:buSzPts val="1400"/>
+              <a:buChar char="●"/>
+            </a:pPr>
             <a:r>
               <a:rPr lang="en-GB" sz="2000" dirty="0">
+                <a:solidFill>
+                  <a:srgbClr val="000000"/>
+                </a:solidFill>
                 <a:latin typeface="Times New Roman" panose="02020603050405020304" pitchFamily="18" charset="0"/>
+                <a:ea typeface="Calibri" panose="020F0502020204030204" pitchFamily="34" charset="0"/>
                 <a:cs typeface="Times New Roman" panose="02020603050405020304" pitchFamily="18" charset="0"/>
               </a:rPr>
               <a:t>Voice &amp; Video Calling: Incorporate live voice and video calling functionalities.</a:t>
             </a:r>
           </a:p>
           <a:p>
+            <a:pPr marL="457200" indent="-317500">
+              <a:lnSpc>
+                <a:spcPct val="100000"/>
+              </a:lnSpc>
+              <a:buClr>
+                <a:srgbClr val="000000"/>
+              </a:buClr>
+              <a:buSzPts val="1400"/>
+              <a:buChar char="●"/>
+            </a:pPr>
             <a:r>
               <a:rPr lang="en-GB" sz="2000" dirty="0">
+                <a:solidFill>
+                  <a:srgbClr val="000000"/>
+                </a:solidFill>
                 <a:latin typeface="Times New Roman" panose="02020603050405020304" pitchFamily="18" charset="0"/>
+                <a:ea typeface="Calibri" panose="020F0502020204030204" pitchFamily="34" charset="0"/>
                 <a:cs typeface="Times New Roman" panose="02020603050405020304" pitchFamily="18" charset="0"/>
               </a:rPr>
               <a:t>End-to-End Encryption: Upgrade messaging security by integrating end-to-end encryption.</a:t>
             </a:r>
           </a:p>
           <a:p>
+            <a:pPr marL="457200" indent="-317500">
+              <a:lnSpc>
+                <a:spcPct val="100000"/>
+              </a:lnSpc>
+              <a:buClr>
+                <a:srgbClr val="000000"/>
+              </a:buClr>
+              <a:buSzPts val="1400"/>
+              <a:buChar char="●"/>
+            </a:pPr>
             <a:r>
               <a:rPr lang="en-GB" sz="2000" dirty="0">
+                <a:solidFill>
+                  <a:srgbClr val="000000"/>
+                </a:solidFill>
                 <a:latin typeface="Times New Roman" panose="02020603050405020304" pitchFamily="18" charset="0"/>
+                <a:ea typeface="Calibri" panose="020F0502020204030204" pitchFamily="34" charset="0"/>
                 <a:cs typeface="Times New Roman" panose="02020603050405020304" pitchFamily="18" charset="0"/>
               </a:rPr>
               <a:t>Group Chat Management: Introduce additional group chat functionalities such as roles and administrators.</a:t>
             </a:r>
           </a:p>
           <a:p>
+            <a:pPr marL="457200" indent="-317500">
+              <a:lnSpc>
+                <a:spcPct val="100000"/>
+              </a:lnSpc>
+              <a:buClr>
+                <a:srgbClr val="000000"/>
+              </a:buClr>
+              <a:buSzPts val="1400"/>
+              <a:buChar char="●"/>
+            </a:pPr>
             <a:r>
               <a:rPr lang="en-GB" sz="2000" dirty="0">
+                <a:solidFill>
+                  <a:srgbClr val="000000"/>
+                </a:solidFill>
                 <a:latin typeface="Times New Roman" panose="02020603050405020304" pitchFamily="18" charset="0"/>
+                <a:ea typeface="Calibri" panose="020F0502020204030204" pitchFamily="34" charset="0"/>
                 <a:cs typeface="Times New Roman" panose="02020603050405020304" pitchFamily="18" charset="0"/>
               </a:rPr>
               <a:t>Chatbots: Implement AI-enabled chatbots for automated support.</a:t>
             </a:r>
           </a:p>
           <a:p>
+            <a:pPr marL="457200" indent="-317500">
+              <a:lnSpc>
+                <a:spcPct val="100000"/>
+              </a:lnSpc>
+              <a:buClr>
+                <a:srgbClr val="000000"/>
+              </a:buClr>
+              <a:buSzPts val="1400"/>
+              <a:buChar char="●"/>
+            </a:pPr>
             <a:r>
               <a:rPr lang="en-GB" sz="2000" dirty="0">
+                <a:solidFill>
+                  <a:srgbClr val="000000"/>
+                </a:solidFill>
                 <a:latin typeface="Times New Roman" panose="02020603050405020304" pitchFamily="18" charset="0"/>
+                <a:ea typeface="Calibri" panose="020F0502020204030204" pitchFamily="34" charset="0"/>
                 <a:cs typeface="Times New Roman" panose="02020603050405020304" pitchFamily="18" charset="0"/>
               </a:rPr>
               <a:t>Cross-Platform Integration: Ensure cross-platform availability on both desktop and mobile devices (iOS and Android).</a:t>
             </a:r>
           </a:p>
           <a:p>
+            <a:pPr marL="457200" indent="-317500">
+              <a:lnSpc>
+                <a:spcPct val="100000"/>
+              </a:lnSpc>
+              <a:buClr>
+                <a:srgbClr val="000000"/>
+              </a:buClr>
+              <a:buSzPts val="1400"/>
+              <a:buChar char="●"/>
+            </a:pPr>
             <a:r>
               <a:rPr lang="en-GB" sz="2000" dirty="0">
+                <a:solidFill>
+                  <a:srgbClr val="000000"/>
+                </a:solidFill>
                 <a:latin typeface="Times New Roman" panose="02020603050405020304" pitchFamily="18" charset="0"/>
+                <a:ea typeface="Calibri" panose="020F0502020204030204" pitchFamily="34" charset="0"/>
                 <a:cs typeface="Times New Roman" panose="02020603050405020304" pitchFamily="18" charset="0"/>
               </a:rPr>
               <a:t>Message Search &amp; Filtering: Upgrade the messaging search engine and include filtering options.</a:t>
             </a:r>
           </a:p>
           <a:p>
+            <a:pPr marL="457200" indent="-317500">
+              <a:lnSpc>
+                <a:spcPct val="100000"/>
+              </a:lnSpc>
+              <a:buClr>
+                <a:srgbClr val="000000"/>
+              </a:buClr>
+              <a:buSzPts val="1400"/>
+              <a:buChar char="●"/>
+            </a:pPr>
             <a:r>
               <a:rPr lang="en-GB" sz="2000" dirty="0">
+                <a:solidFill>
+                  <a:srgbClr val="000000"/>
+                </a:solidFill>
                 <a:latin typeface="Times New Roman" panose="02020603050405020304" pitchFamily="18" charset="0"/>
+                <a:ea typeface="Calibri" panose="020F0502020204030204" pitchFamily="34" charset="0"/>
                 <a:cs typeface="Times New Roman" panose="02020603050405020304" pitchFamily="18" charset="0"/>
               </a:rPr>
               <a:t>Presence Status Indicators: Include presence status indicators for users.</a:t>
             </a:r>
           </a:p>
           <a:p>
+            <a:pPr marL="457200" indent="-317500">
+              <a:lnSpc>
+                <a:spcPct val="100000"/>
+              </a:lnSpc>
+              <a:buClr>
+                <a:srgbClr val="000000"/>
+              </a:buClr>
+              <a:buSzPts val="1400"/>
+              <a:buChar char="●"/>
+            </a:pPr>
             <a:r>
               <a:rPr lang="en-GB" sz="2000" dirty="0">
+                <a:solidFill>
+                  <a:srgbClr val="000000"/>
+                </a:solidFill>
                 <a:latin typeface="Times New Roman" panose="02020603050405020304" pitchFamily="18" charset="0"/>
+                <a:ea typeface="Calibri" panose="020F0502020204030204" pitchFamily="34" charset="0"/>
                 <a:cs typeface="Times New Roman" panose="02020603050405020304" pitchFamily="18" charset="0"/>
               </a:rPr>
               <a:t>Themes &amp; Customization: Introduce theme and customization settings.</a:t>
             </a:r>
             <a:endParaRPr lang="en-US" sz="2000" dirty="0">
+              <a:solidFill>
+                <a:srgbClr val="000000"/>
+              </a:solidFill>
               <a:latin typeface="Times New Roman" panose="02020603050405020304" pitchFamily="18" charset="0"/>
+              <a:ea typeface="Calibri" panose="020F0502020204030204" pitchFamily="34" charset="0"/>
               <a:cs typeface="Times New Roman" panose="02020603050405020304" pitchFamily="18" charset="0"/>
             </a:endParaRPr>
           </a:p>
@@ -3972,13 +4125,12 @@
           <a:bodyPr/>
           <a:lstStyle/>
           <a:p>
-            <a:pPr algn="ctr"/>
             <a:r>
               <a:rPr lang="en-US" sz="3200" dirty="0">
                 <a:latin typeface="Times New Roman" panose="02020603050405020304" pitchFamily="18" charset="0"/>
                 <a:cs typeface="Times New Roman" panose="02020603050405020304" pitchFamily="18" charset="0"/>
               </a:rPr>
-              <a:t>conclusion</a:t>
+              <a:t>  Conclusion</a:t>
             </a:r>
           </a:p>
         </p:txBody>
@@ -4001,8 +4153,8 @@
         </p:nvSpPr>
         <p:spPr>
           <a:xfrm>
-            <a:off x="339365" y="1621410"/>
-            <a:ext cx="8550111" cy="3960390"/>
+            <a:off x="339365" y="1137920"/>
+            <a:ext cx="8296635" cy="5334000"/>
           </a:xfrm>
         </p:spPr>
         <p:txBody>
@@ -4010,6 +4162,9 @@
           <a:lstStyle/>
           <a:p>
             <a:pPr marL="0" indent="0" algn="just">
+              <a:lnSpc>
+                <a:spcPct val="150000"/>
+              </a:lnSpc>
               <a:buNone/>
             </a:pPr>
             <a:r>
@@ -4025,6 +4180,11 @@
             </a:endParaRPr>
           </a:p>
           <a:p>
+            <a:pPr>
+              <a:lnSpc>
+                <a:spcPct val="150000"/>
+              </a:lnSpc>
+            </a:pPr>
             <a:endParaRPr lang="en-US" sz="2000" dirty="0"/>
           </a:p>
         </p:txBody>
@@ -4195,7 +4355,7 @@
         </p:nvSpPr>
         <p:spPr>
           <a:xfrm>
-            <a:off x="457200" y="0"/>
+            <a:off x="0" y="0"/>
             <a:ext cx="6019560" cy="837720"/>
           </a:xfrm>
           <a:prstGeom prst="rect">
@@ -4212,7 +4372,7 @@
           </a:bodyPr>
           <a:lstStyle/>
           <a:p>
-            <a:pPr algn="ctr">
+            <a:pPr>
               <a:lnSpc>
                 <a:spcPct val="100000"/>
               </a:lnSpc>
@@ -4222,7 +4382,7 @@
                 <a:latin typeface="Times New Roman" panose="02020603050405020304" pitchFamily="18" charset="0"/>
                 <a:cs typeface="Times New Roman" panose="02020603050405020304" pitchFamily="18" charset="0"/>
               </a:rPr>
-              <a:t>Introduction</a:t>
+              <a:t> Introduction</a:t>
             </a:r>
             <a:endParaRPr lang="en-US" sz="3000" b="0" strike="noStrike" spc="-1" dirty="0">
               <a:solidFill>
@@ -4236,64 +4396,13 @@
       </p:sp>
       <p:sp>
         <p:nvSpPr>
-          <p:cNvPr id="110" name="TextShape 3"/>
-          <p:cNvSpPr txBox="1"/>
-          <p:nvPr/>
-        </p:nvSpPr>
-        <p:spPr>
-          <a:xfrm>
-            <a:off x="6553080" y="6356520"/>
-            <a:ext cx="2133360" cy="364680"/>
-          </a:xfrm>
-          <a:prstGeom prst="rect">
-            <a:avLst/>
-          </a:prstGeom>
-          <a:noFill/>
-          <a:ln>
-            <a:noFill/>
-          </a:ln>
-        </p:spPr>
-        <p:txBody>
-          <a:bodyPr anchor="ctr">
-            <a:noAutofit/>
-          </a:bodyPr>
-          <a:lstStyle/>
-          <a:p>
-            <a:pPr algn="r">
-              <a:lnSpc>
-                <a:spcPct val="100000"/>
-              </a:lnSpc>
-            </a:pPr>
-            <a:fld id="{4D4FEEEE-7AC5-48A9-86F4-13448BE87B58}" type="slidenum">
-              <a:rPr lang="en-US" sz="1200" b="1" strike="noStrike" spc="-1">
-                <a:solidFill>
-                  <a:srgbClr val="000000"/>
-                </a:solidFill>
-                <a:latin typeface="Calibri"/>
-                <a:ea typeface="MS PGothic"/>
-              </a:rPr>
-              <a:pPr algn="r">
-                <a:lnSpc>
-                  <a:spcPct val="100000"/>
-                </a:lnSpc>
-              </a:pPr>
-              <a:t>2</a:t>
-            </a:fld>
-            <a:endParaRPr lang="en-GB" sz="1200" b="0" strike="noStrike" spc="-1">
-              <a:latin typeface="Times New Roman"/>
-            </a:endParaRPr>
-          </a:p>
-        </p:txBody>
-      </p:sp>
-      <p:sp>
-        <p:nvSpPr>
           <p:cNvPr id="5" name="TextShape 2"/>
           <p:cNvSpPr txBox="1"/>
           <p:nvPr/>
         </p:nvSpPr>
         <p:spPr>
           <a:xfrm>
-            <a:off x="305280" y="1090888"/>
+            <a:off x="0" y="1517949"/>
             <a:ext cx="8838720" cy="4838571"/>
           </a:xfrm>
           <a:prstGeom prst="rect">
@@ -4310,23 +4419,13 @@
           </a:bodyPr>
           <a:lstStyle/>
           <a:p>
-            <a:pPr>
+            <a:pPr marL="457200" lvl="0" indent="-317500">
               <a:lnSpc>
-                <a:spcPct val="150000"/>
+                <a:spcPct val="200000"/>
               </a:lnSpc>
               <a:spcBef>
-                <a:spcPts val="400"/>
+                <a:spcPct val="0"/>
               </a:spcBef>
-            </a:pPr>
-            <a:endParaRPr lang="en-US" sz="1900" b="0" strike="noStrike" spc="-1" dirty="0">
-              <a:solidFill>
-                <a:srgbClr val="000000"/>
-              </a:solidFill>
-              <a:latin typeface="Calibri"/>
-            </a:endParaRPr>
-          </a:p>
-          <a:p>
-            <a:pPr marL="457200" lvl="0" indent="-317500">
               <a:buClr>
                 <a:srgbClr val="000000"/>
               </a:buClr>
@@ -4347,6 +4446,12 @@
           </a:p>
           <a:p>
             <a:pPr marL="457200" lvl="0" indent="-317500">
+              <a:lnSpc>
+                <a:spcPct val="200000"/>
+              </a:lnSpc>
+              <a:spcBef>
+                <a:spcPct val="0"/>
+              </a:spcBef>
               <a:buClr>
                 <a:srgbClr val="000000"/>
               </a:buClr>
@@ -4362,11 +4467,17 @@
                 <a:ea typeface="Calibri" panose="020F0502020204030204" pitchFamily="34" charset="0"/>
                 <a:cs typeface="Times New Roman" panose="02020603050405020304" pitchFamily="18" charset="0"/>
               </a:rPr>
-              <a:t> Supports instant messaging and media uploading.</a:t>
+              <a:t>Supports instant messaging and media uploading.</a:t>
             </a:r>
           </a:p>
           <a:p>
             <a:pPr marL="457200" lvl="0" indent="-317500">
+              <a:lnSpc>
+                <a:spcPct val="200000"/>
+              </a:lnSpc>
+              <a:spcBef>
+                <a:spcPct val="0"/>
+              </a:spcBef>
               <a:buClr>
                 <a:srgbClr val="000000"/>
               </a:buClr>
@@ -4382,11 +4493,17 @@
                 <a:ea typeface="Calibri" panose="020F0502020204030204" pitchFamily="34" charset="0"/>
                 <a:cs typeface="Times New Roman" panose="02020603050405020304" pitchFamily="18" charset="0"/>
               </a:rPr>
-              <a:t> Real-time notifications for receiving any new message.</a:t>
+              <a:t>Real-time notifications for receiving any new message.</a:t>
             </a:r>
           </a:p>
           <a:p>
             <a:pPr marL="457200" lvl="0" indent="-317500">
+              <a:lnSpc>
+                <a:spcPct val="200000"/>
+              </a:lnSpc>
+              <a:spcBef>
+                <a:spcPct val="0"/>
+              </a:spcBef>
               <a:buClr>
                 <a:srgbClr val="000000"/>
               </a:buClr>
@@ -4402,11 +4519,17 @@
                 <a:ea typeface="Calibri" panose="020F0502020204030204" pitchFamily="34" charset="0"/>
                 <a:cs typeface="Times New Roman" panose="02020603050405020304" pitchFamily="18" charset="0"/>
               </a:rPr>
-              <a:t> Can be used for personal or professional communications.</a:t>
+              <a:t>Can be used for personal or professional communications.</a:t>
             </a:r>
           </a:p>
           <a:p>
             <a:pPr marL="457200" lvl="0" indent="-317500">
+              <a:lnSpc>
+                <a:spcPct val="200000"/>
+              </a:lnSpc>
+              <a:spcBef>
+                <a:spcPct val="0"/>
+              </a:spcBef>
               <a:buClr>
                 <a:srgbClr val="000000"/>
               </a:buClr>
@@ -4422,11 +4545,17 @@
                 <a:ea typeface="Calibri" panose="020F0502020204030204" pitchFamily="34" charset="0"/>
                 <a:cs typeface="Times New Roman" panose="02020603050405020304" pitchFamily="18" charset="0"/>
               </a:rPr>
-              <a:t> Emphasizes on safety, speed, and usability.</a:t>
+              <a:t>Emphasizes on safety, speed, and usability.</a:t>
             </a:r>
           </a:p>
           <a:p>
             <a:pPr marL="457200" lvl="0" indent="-317500">
+              <a:lnSpc>
+                <a:spcPct val="200000"/>
+              </a:lnSpc>
+              <a:spcBef>
+                <a:spcPct val="0"/>
+              </a:spcBef>
               <a:buClr>
                 <a:srgbClr val="000000"/>
               </a:buClr>
@@ -4442,173 +4571,15 @@
                 <a:ea typeface="Calibri" panose="020F0502020204030204" pitchFamily="34" charset="0"/>
                 <a:cs typeface="Times New Roman" panose="02020603050405020304" pitchFamily="18" charset="0"/>
               </a:rPr>
-              <a:t> Has a friendly user interface for ease of use.</a:t>
-            </a:r>
-            <a:endParaRPr lang="en-US" sz="1900" b="0" strike="noStrike" spc="-1" dirty="0">
+              <a:t>Has a friendly user interface for ease of use.</a:t>
+            </a:r>
+            <a:endParaRPr lang="en-US" sz="2000" dirty="0">
               <a:solidFill>
                 <a:srgbClr val="000000"/>
               </a:solidFill>
-              <a:latin typeface="Calibri"/>
-            </a:endParaRPr>
-          </a:p>
-          <a:p>
-            <a:pPr>
-              <a:lnSpc>
-                <a:spcPct val="100000"/>
-              </a:lnSpc>
-              <a:spcBef>
-                <a:spcPts val="400"/>
-              </a:spcBef>
-            </a:pPr>
-            <a:endParaRPr lang="en-US" sz="1900" spc="-1" dirty="0">
-              <a:solidFill>
-                <a:srgbClr val="000000"/>
-              </a:solidFill>
-              <a:latin typeface="Calibri"/>
-            </a:endParaRPr>
-          </a:p>
-          <a:p>
-            <a:pPr>
-              <a:lnSpc>
-                <a:spcPct val="150000"/>
-              </a:lnSpc>
-              <a:spcBef>
-                <a:spcPts val="400"/>
-              </a:spcBef>
-            </a:pPr>
-            <a:endParaRPr lang="en-US" sz="1900" b="0" strike="noStrike" spc="-1" dirty="0">
-              <a:solidFill>
-                <a:srgbClr val="000000"/>
-              </a:solidFill>
-              <a:latin typeface="Calibri"/>
-            </a:endParaRPr>
-          </a:p>
-          <a:p>
-            <a:pPr>
-              <a:lnSpc>
-                <a:spcPct val="150000"/>
-              </a:lnSpc>
-              <a:spcBef>
-                <a:spcPts val="400"/>
-              </a:spcBef>
-            </a:pPr>
-            <a:endParaRPr lang="en-US" sz="1900" b="0" strike="noStrike" spc="-1" dirty="0">
-              <a:solidFill>
-                <a:srgbClr val="000000"/>
-              </a:solidFill>
-              <a:latin typeface="Calibri"/>
-            </a:endParaRPr>
-          </a:p>
-          <a:p>
-            <a:pPr>
-              <a:lnSpc>
-                <a:spcPct val="150000"/>
-              </a:lnSpc>
-              <a:spcBef>
-                <a:spcPts val="400"/>
-              </a:spcBef>
-            </a:pPr>
-            <a:endParaRPr lang="en-US" sz="1900" b="0" strike="noStrike" spc="-1" dirty="0">
-              <a:solidFill>
-                <a:srgbClr val="000000"/>
-              </a:solidFill>
-              <a:latin typeface="Calibri"/>
-            </a:endParaRPr>
-          </a:p>
-          <a:p>
-            <a:pPr>
-              <a:lnSpc>
-                <a:spcPct val="150000"/>
-              </a:lnSpc>
-              <a:spcBef>
-                <a:spcPts val="400"/>
-              </a:spcBef>
-            </a:pPr>
-            <a:endParaRPr lang="en-US" sz="1900" b="0" strike="noStrike" spc="-1" dirty="0">
-              <a:solidFill>
-                <a:srgbClr val="000000"/>
-              </a:solidFill>
-              <a:latin typeface="Calibri"/>
-            </a:endParaRPr>
-          </a:p>
-          <a:p>
-            <a:pPr>
-              <a:lnSpc>
-                <a:spcPct val="100000"/>
-              </a:lnSpc>
-              <a:spcBef>
-                <a:spcPts val="400"/>
-              </a:spcBef>
-            </a:pPr>
-            <a:endParaRPr lang="en-US" sz="1900" b="0" strike="noStrike" spc="-1" dirty="0">
-              <a:solidFill>
-                <a:srgbClr val="000000"/>
-              </a:solidFill>
-              <a:latin typeface="Calibri"/>
-            </a:endParaRPr>
-          </a:p>
-          <a:p>
-            <a:pPr>
-              <a:lnSpc>
-                <a:spcPct val="100000"/>
-              </a:lnSpc>
-              <a:spcBef>
-                <a:spcPts val="400"/>
-              </a:spcBef>
-            </a:pPr>
-            <a:endParaRPr lang="en-US" sz="1900" b="0" strike="noStrike" spc="-1" dirty="0">
-              <a:solidFill>
-                <a:srgbClr val="000000"/>
-              </a:solidFill>
-              <a:latin typeface="Calibri"/>
-            </a:endParaRPr>
-          </a:p>
-          <a:p>
-            <a:pPr>
-              <a:lnSpc>
-                <a:spcPct val="100000"/>
-              </a:lnSpc>
-              <a:spcBef>
-                <a:spcPts val="400"/>
-              </a:spcBef>
-            </a:pPr>
-            <a:endParaRPr lang="en-US" sz="1900" b="0" strike="noStrike" spc="-1" dirty="0">
-              <a:solidFill>
-                <a:srgbClr val="000000"/>
-              </a:solidFill>
-              <a:latin typeface="Calibri"/>
-            </a:endParaRPr>
-          </a:p>
-          <a:p>
-            <a:pPr>
-              <a:lnSpc>
-                <a:spcPct val="100000"/>
-              </a:lnSpc>
-              <a:spcBef>
-                <a:spcPts val="400"/>
-              </a:spcBef>
-            </a:pPr>
-            <a:endParaRPr lang="en-US" sz="1900" b="0" strike="noStrike" spc="-1" dirty="0">
-              <a:solidFill>
-                <a:srgbClr val="000000"/>
-              </a:solidFill>
-              <a:latin typeface="Calibri"/>
-            </a:endParaRPr>
-          </a:p>
-          <a:p>
-            <a:pPr>
-              <a:lnSpc>
-                <a:spcPct val="100000"/>
-              </a:lnSpc>
-              <a:spcBef>
-                <a:spcPts val="400"/>
-              </a:spcBef>
-            </a:pPr>
-            <a:endParaRPr lang="en-US" sz="1900" b="0" strike="noStrike" spc="-1" dirty="0">
-              <a:solidFill>
-                <a:srgbClr val="000000"/>
-              </a:solidFill>
-              <a:latin typeface="Calibri"/>
+              <a:latin typeface="Times New Roman" panose="02020603050405020304" pitchFamily="18" charset="0"/>
+              <a:ea typeface="Calibri" panose="020F0502020204030204" pitchFamily="34" charset="0"/>
+              <a:cs typeface="Times New Roman" panose="02020603050405020304" pitchFamily="18" charset="0"/>
             </a:endParaRPr>
           </a:p>
         </p:txBody>
@@ -4654,12 +4625,16 @@
             <p:ph type="title"/>
           </p:nvPr>
         </p:nvSpPr>
-        <p:spPr/>
+        <p:spPr>
+          <a:xfrm>
+            <a:off x="0" y="0"/>
+            <a:ext cx="5486040" cy="833120"/>
+          </a:xfrm>
+        </p:spPr>
         <p:txBody>
           <a:bodyPr/>
           <a:lstStyle/>
           <a:p>
-            <a:pPr algn="ctr"/>
             <a:r>
               <a:rPr lang="en-US" altLang="en-US" sz="3200" dirty="0">
                 <a:latin typeface="Times New Roman" panose="02020603050405020304" pitchFamily="18" charset="0"/>
@@ -4667,7 +4642,7 @@
                 <a:cs typeface="Times New Roman" panose="02020603050405020304" pitchFamily="18" charset="0"/>
                 <a:sym typeface="Times Roman"/>
               </a:rPr>
-              <a:t>Problem Statement</a:t>
+              <a:t>  Problem Statement</a:t>
             </a:r>
             <a:endParaRPr lang="en-US" sz="3200" dirty="0">
               <a:latin typeface="Times New Roman" panose="02020603050405020304" pitchFamily="18" charset="0"/>
@@ -4702,60 +4677,162 @@
           <a:bodyPr/>
           <a:lstStyle/>
           <a:p>
+            <a:pPr marL="457200" indent="-317500">
+              <a:lnSpc>
+                <a:spcPct val="100000"/>
+              </a:lnSpc>
+              <a:buClr>
+                <a:srgbClr val="000000"/>
+              </a:buClr>
+              <a:buSzPts val="1400"/>
+              <a:buChar char="●"/>
+            </a:pPr>
             <a:r>
               <a:rPr lang="en-GB" sz="2000" dirty="0">
+                <a:solidFill>
+                  <a:srgbClr val="000000"/>
+                </a:solidFill>
                 <a:latin typeface="Times New Roman" panose="02020603050405020304" pitchFamily="18" charset="0"/>
+                <a:ea typeface="Calibri" panose="020F0502020204030204" pitchFamily="34" charset="0"/>
                 <a:cs typeface="Times New Roman" panose="02020603050405020304" pitchFamily="18" charset="0"/>
               </a:rPr>
               <a:t>Delayed messaging: Slow message delivery can cause inefficiencies when there is an urgent need for communication.</a:t>
             </a:r>
           </a:p>
           <a:p>
+            <a:pPr marL="457200" indent="-317500">
+              <a:lnSpc>
+                <a:spcPct val="100000"/>
+              </a:lnSpc>
+              <a:buClr>
+                <a:srgbClr val="000000"/>
+              </a:buClr>
+              <a:buSzPts val="1400"/>
+              <a:buChar char="●"/>
+            </a:pPr>
             <a:endParaRPr lang="en-GB" sz="2000" dirty="0">
+              <a:solidFill>
+                <a:srgbClr val="000000"/>
+              </a:solidFill>
               <a:latin typeface="Times New Roman" panose="02020603050405020304" pitchFamily="18" charset="0"/>
+              <a:ea typeface="Calibri" panose="020F0502020204030204" pitchFamily="34" charset="0"/>
               <a:cs typeface="Times New Roman" panose="02020603050405020304" pitchFamily="18" charset="0"/>
             </a:endParaRPr>
           </a:p>
           <a:p>
+            <a:pPr marL="457200" indent="-317500">
+              <a:lnSpc>
+                <a:spcPct val="100000"/>
+              </a:lnSpc>
+              <a:buClr>
+                <a:srgbClr val="000000"/>
+              </a:buClr>
+              <a:buSzPts val="1400"/>
+              <a:buChar char="●"/>
+            </a:pPr>
             <a:r>
               <a:rPr lang="en-GB" sz="2000" dirty="0">
+                <a:solidFill>
+                  <a:srgbClr val="000000"/>
+                </a:solidFill>
                 <a:latin typeface="Times New Roman" panose="02020603050405020304" pitchFamily="18" charset="0"/>
+                <a:ea typeface="Calibri" panose="020F0502020204030204" pitchFamily="34" charset="0"/>
                 <a:cs typeface="Times New Roman" panose="02020603050405020304" pitchFamily="18" charset="0"/>
               </a:rPr>
               <a:t>Complexity in interfaces: Some applications are too complex, thus hindering efficient communication.</a:t>
             </a:r>
           </a:p>
           <a:p>
+            <a:pPr marL="457200" indent="-317500">
+              <a:lnSpc>
+                <a:spcPct val="100000"/>
+              </a:lnSpc>
+              <a:buClr>
+                <a:srgbClr val="000000"/>
+              </a:buClr>
+              <a:buSzPts val="1400"/>
+              <a:buChar char="●"/>
+            </a:pPr>
             <a:endParaRPr lang="en-GB" sz="2000" dirty="0">
+              <a:solidFill>
+                <a:srgbClr val="000000"/>
+              </a:solidFill>
               <a:latin typeface="Times New Roman" panose="02020603050405020304" pitchFamily="18" charset="0"/>
+              <a:ea typeface="Calibri" panose="020F0502020204030204" pitchFamily="34" charset="0"/>
               <a:cs typeface="Times New Roman" panose="02020603050405020304" pitchFamily="18" charset="0"/>
             </a:endParaRPr>
           </a:p>
           <a:p>
+            <a:pPr marL="457200" indent="-317500">
+              <a:lnSpc>
+                <a:spcPct val="100000"/>
+              </a:lnSpc>
+              <a:buClr>
+                <a:srgbClr val="000000"/>
+              </a:buClr>
+              <a:buSzPts val="1400"/>
+              <a:buChar char="●"/>
+            </a:pPr>
             <a:r>
               <a:rPr lang="en-GB" sz="2000" dirty="0">
+                <a:solidFill>
+                  <a:srgbClr val="000000"/>
+                </a:solidFill>
                 <a:latin typeface="Times New Roman" panose="02020603050405020304" pitchFamily="18" charset="0"/>
+                <a:ea typeface="Calibri" panose="020F0502020204030204" pitchFamily="34" charset="0"/>
                 <a:cs typeface="Times New Roman" panose="02020603050405020304" pitchFamily="18" charset="0"/>
               </a:rPr>
               <a:t>Cross-platform compatibility: Most chatting applications do not support cross-platform compatibility, which can make communication cumbersome across various devices and platforms (web and mobile).</a:t>
             </a:r>
           </a:p>
           <a:p>
+            <a:pPr marL="457200" indent="-317500">
+              <a:lnSpc>
+                <a:spcPct val="100000"/>
+              </a:lnSpc>
+              <a:buClr>
+                <a:srgbClr val="000000"/>
+              </a:buClr>
+              <a:buSzPts val="1400"/>
+              <a:buChar char="●"/>
+            </a:pPr>
             <a:endParaRPr lang="en-GB" sz="2000" dirty="0">
+              <a:solidFill>
+                <a:srgbClr val="000000"/>
+              </a:solidFill>
               <a:latin typeface="Times New Roman" panose="02020603050405020304" pitchFamily="18" charset="0"/>
+              <a:ea typeface="Calibri" panose="020F0502020204030204" pitchFamily="34" charset="0"/>
               <a:cs typeface="Times New Roman" panose="02020603050405020304" pitchFamily="18" charset="0"/>
             </a:endParaRPr>
           </a:p>
           <a:p>
+            <a:pPr marL="457200" indent="-317500">
+              <a:lnSpc>
+                <a:spcPct val="100000"/>
+              </a:lnSpc>
+              <a:buClr>
+                <a:srgbClr val="000000"/>
+              </a:buClr>
+              <a:buSzPts val="1400"/>
+              <a:buChar char="●"/>
+            </a:pPr>
             <a:r>
               <a:rPr lang="en-GB" sz="2000" dirty="0">
+                <a:solidFill>
+                  <a:srgbClr val="000000"/>
+                </a:solidFill>
                 <a:latin typeface="Times New Roman" panose="02020603050405020304" pitchFamily="18" charset="0"/>
+                <a:ea typeface="Calibri" panose="020F0502020204030204" pitchFamily="34" charset="0"/>
                 <a:cs typeface="Times New Roman" panose="02020603050405020304" pitchFamily="18" charset="0"/>
               </a:rPr>
               <a:t>Group management challenges: Most applications do not incorporate proper group management capabilities.</a:t>
             </a:r>
             <a:endParaRPr lang="en-US" sz="2000" dirty="0">
+              <a:solidFill>
+                <a:srgbClr val="000000"/>
+              </a:solidFill>
               <a:latin typeface="Times New Roman" panose="02020603050405020304" pitchFamily="18" charset="0"/>
+              <a:ea typeface="Calibri" panose="020F0502020204030204" pitchFamily="34" charset="0"/>
               <a:cs typeface="Times New Roman" panose="02020603050405020304" pitchFamily="18" charset="0"/>
             </a:endParaRPr>
           </a:p>
@@ -4812,14 +4889,13 @@
           <a:bodyPr/>
           <a:lstStyle/>
           <a:p>
-            <a:pPr algn="ctr"/>
             <a:r>
               <a:rPr lang="en-US" sz="3200" dirty="0">
                 <a:latin typeface="Times New Roman" panose="02020603050405020304" pitchFamily="18" charset="0"/>
                 <a:cs typeface="Times New Roman" panose="02020603050405020304" pitchFamily="18" charset="0"/>
                 <a:sym typeface="Calibri"/>
               </a:rPr>
-              <a:t>Technologies Used</a:t>
+              <a:t>  Technologies Used</a:t>
             </a:r>
             <a:endParaRPr lang="en-US" sz="3200" dirty="0">
               <a:latin typeface="Times New Roman" panose="02020603050405020304" pitchFamily="18" charset="0"/>
@@ -4846,36 +4922,36 @@
         </p:nvSpPr>
         <p:spPr>
           <a:xfrm>
-            <a:off x="141402" y="791853"/>
-            <a:ext cx="8545038" cy="5948312"/>
+            <a:off x="294640" y="914040"/>
+            <a:ext cx="8391800" cy="5653045"/>
           </a:xfrm>
         </p:spPr>
         <p:txBody>
           <a:bodyPr/>
           <a:lstStyle/>
           <a:p>
+            <a:r>
+              <a:rPr lang="en-GB" sz="2000" b="1" dirty="0">
+                <a:latin typeface="Times New Roman" panose="02020603050405020304" pitchFamily="18" charset="0"/>
+                <a:cs typeface="Times New Roman" panose="02020603050405020304" pitchFamily="18" charset="0"/>
+              </a:rPr>
+              <a:t>Frontend:</a:t>
+            </a:r>
+          </a:p>
+          <a:p>
+            <a:pPr lvl="1"/>
             <a:r>
               <a:rPr lang="en-GB" sz="2000" dirty="0">
                 <a:latin typeface="Times New Roman" panose="02020603050405020304" pitchFamily="18" charset="0"/>
                 <a:cs typeface="Times New Roman" panose="02020603050405020304" pitchFamily="18" charset="0"/>
               </a:rPr>
-              <a:t>Frontend:</a:t>
+              <a:t>HTML, CSS, JavaScript: Basic elements to build the framework of websites.</a:t>
             </a:r>
           </a:p>
           <a:p>
             <a:pPr lvl="1"/>
             <a:r>
-              <a:rPr lang="en-GB" sz="1600" dirty="0">
-                <a:latin typeface="Times New Roman" panose="02020603050405020304" pitchFamily="18" charset="0"/>
-                <a:cs typeface="Times New Roman" panose="02020603050405020304" pitchFamily="18" charset="0"/>
-              </a:rPr>
-              <a:t>HTML, CSS, JavaScript: Basic elements to build the framework of websites.</a:t>
-            </a:r>
-          </a:p>
-          <a:p>
-            <a:pPr lvl="1"/>
-            <a:r>
-              <a:rPr lang="en-GB" sz="1600" dirty="0">
+              <a:rPr lang="en-GB" sz="2000" dirty="0">
                 <a:latin typeface="Times New Roman" panose="02020603050405020304" pitchFamily="18" charset="0"/>
                 <a:cs typeface="Times New Roman" panose="02020603050405020304" pitchFamily="18" charset="0"/>
               </a:rPr>
@@ -4883,28 +4959,35 @@
             </a:r>
           </a:p>
           <a:p>
+            <a:pPr lvl="1"/>
+            <a:endParaRPr lang="en-GB" sz="2000" dirty="0">
+              <a:latin typeface="Times New Roman" panose="02020603050405020304" pitchFamily="18" charset="0"/>
+              <a:cs typeface="Times New Roman" panose="02020603050405020304" pitchFamily="18" charset="0"/>
+            </a:endParaRPr>
+          </a:p>
+          <a:p>
+            <a:r>
+              <a:rPr lang="en-GB" sz="2000" b="1" dirty="0">
+                <a:latin typeface="Times New Roman" panose="02020603050405020304" pitchFamily="18" charset="0"/>
+                <a:cs typeface="Times New Roman" panose="02020603050405020304" pitchFamily="18" charset="0"/>
+              </a:rPr>
+              <a:t>Backend:</a:t>
+            </a:r>
+          </a:p>
+          <a:p>
+            <a:pPr lvl="1"/>
             <a:r>
               <a:rPr lang="en-GB" sz="2000" dirty="0">
                 <a:latin typeface="Times New Roman" panose="02020603050405020304" pitchFamily="18" charset="0"/>
                 <a:cs typeface="Times New Roman" panose="02020603050405020304" pitchFamily="18" charset="0"/>
               </a:rPr>
-              <a:t>Backend:</a:t>
+              <a:t>Node.js: Technology to handle backend operations and creating API.</a:t>
             </a:r>
           </a:p>
           <a:p>
             <a:pPr lvl="1"/>
             <a:r>
-              <a:rPr lang="en-GB" sz="1600" dirty="0">
-                <a:latin typeface="Times New Roman" panose="02020603050405020304" pitchFamily="18" charset="0"/>
-                <a:cs typeface="Times New Roman" panose="02020603050405020304" pitchFamily="18" charset="0"/>
-              </a:rPr>
-              <a:t>Node.js: Technology to handle backend operations and creating API.</a:t>
-            </a:r>
-          </a:p>
-          <a:p>
-            <a:pPr lvl="1"/>
-            <a:r>
-              <a:rPr lang="en-GB" sz="1600" dirty="0">
+              <a:rPr lang="en-GB" sz="2000" dirty="0">
                 <a:latin typeface="Times New Roman" panose="02020603050405020304" pitchFamily="18" charset="0"/>
                 <a:cs typeface="Times New Roman" panose="02020603050405020304" pitchFamily="18" charset="0"/>
               </a:rPr>
@@ -4912,42 +4995,49 @@
             </a:r>
           </a:p>
           <a:p>
+            <a:pPr lvl="1"/>
+            <a:endParaRPr lang="en-GB" sz="2000" dirty="0">
+              <a:latin typeface="Times New Roman" panose="02020603050405020304" pitchFamily="18" charset="0"/>
+              <a:cs typeface="Times New Roman" panose="02020603050405020304" pitchFamily="18" charset="0"/>
+            </a:endParaRPr>
+          </a:p>
+          <a:p>
+            <a:r>
+              <a:rPr lang="en-GB" sz="2000" b="1" dirty="0">
+                <a:latin typeface="Times New Roman" panose="02020603050405020304" pitchFamily="18" charset="0"/>
+                <a:cs typeface="Times New Roman" panose="02020603050405020304" pitchFamily="18" charset="0"/>
+              </a:rPr>
+              <a:t>Database:</a:t>
+            </a:r>
+          </a:p>
+          <a:p>
+            <a:pPr lvl="1"/>
             <a:r>
               <a:rPr lang="en-GB" sz="2000" dirty="0">
                 <a:latin typeface="Times New Roman" panose="02020603050405020304" pitchFamily="18" charset="0"/>
                 <a:cs typeface="Times New Roman" panose="02020603050405020304" pitchFamily="18" charset="0"/>
               </a:rPr>
-              <a:t>Database:</a:t>
+              <a:t>MongoDB: NoSQL Database to store user data.</a:t>
             </a:r>
           </a:p>
           <a:p>
             <a:pPr lvl="1"/>
             <a:r>
-              <a:rPr lang="en-GB" sz="1600" dirty="0">
-                <a:latin typeface="Times New Roman" panose="02020603050405020304" pitchFamily="18" charset="0"/>
-                <a:cs typeface="Times New Roman" panose="02020603050405020304" pitchFamily="18" charset="0"/>
-              </a:rPr>
-              <a:t>MongoDB: NoSQL Database to store user data.</a:t>
-            </a:r>
-          </a:p>
-          <a:p>
-            <a:pPr lvl="1"/>
-            <a:r>
-              <a:rPr lang="en-GB" sz="1600" dirty="0">
+              <a:rPr lang="en-GB" sz="2000" dirty="0">
                 <a:latin typeface="Times New Roman" panose="02020603050405020304" pitchFamily="18" charset="0"/>
                 <a:cs typeface="Times New Roman" panose="02020603050405020304" pitchFamily="18" charset="0"/>
               </a:rPr>
               <a:t>Mongoose: It is used to simplify working with databases through data </a:t>
             </a:r>
             <a:r>
-              <a:rPr lang="en-GB" sz="1600" dirty="0" err="1">
+              <a:rPr lang="en-GB" sz="2000" dirty="0" err="1">
                 <a:latin typeface="Times New Roman" panose="02020603050405020304" pitchFamily="18" charset="0"/>
                 <a:cs typeface="Times New Roman" panose="02020603050405020304" pitchFamily="18" charset="0"/>
               </a:rPr>
               <a:t>modeling</a:t>
             </a:r>
             <a:r>
-              <a:rPr lang="en-GB" sz="1600" dirty="0">
+              <a:rPr lang="en-GB" sz="2000" dirty="0">
                 <a:latin typeface="Times New Roman" panose="02020603050405020304" pitchFamily="18" charset="0"/>
                 <a:cs typeface="Times New Roman" panose="02020603050405020304" pitchFamily="18" charset="0"/>
               </a:rPr>
@@ -4957,7 +5047,7 @@
           <a:p>
             <a:pPr lvl="1"/>
             <a:r>
-              <a:rPr lang="en-GB" sz="1600" dirty="0">
+              <a:rPr lang="en-GB" sz="2000" dirty="0">
                 <a:latin typeface="Times New Roman" panose="02020603050405020304" pitchFamily="18" charset="0"/>
                 <a:cs typeface="Times New Roman" panose="02020603050405020304" pitchFamily="18" charset="0"/>
               </a:rPr>
@@ -4967,13 +5057,13 @@
           <a:p>
             <a:pPr lvl="1"/>
             <a:r>
-              <a:rPr lang="en-GB" sz="1600" dirty="0">
+              <a:rPr lang="en-GB" sz="2000" dirty="0">
                 <a:latin typeface="Times New Roman" panose="02020603050405020304" pitchFamily="18" charset="0"/>
                 <a:cs typeface="Times New Roman" panose="02020603050405020304" pitchFamily="18" charset="0"/>
               </a:rPr>
               <a:t>PostgreSQL : Open-source and robust relational database.</a:t>
             </a:r>
-            <a:endParaRPr lang="en-US" sz="1600" dirty="0">
+            <a:endParaRPr lang="en-US" sz="2000" dirty="0">
               <a:latin typeface="Times New Roman" panose="02020603050405020304" pitchFamily="18" charset="0"/>
               <a:cs typeface="Times New Roman" panose="02020603050405020304" pitchFamily="18" charset="0"/>
             </a:endParaRPr>
@@ -5031,13 +5121,12 @@
           <a:bodyPr/>
           <a:lstStyle/>
           <a:p>
-            <a:pPr algn="ctr"/>
             <a:r>
               <a:rPr lang="en-US" sz="3200" dirty="0">
                 <a:latin typeface="Times New Roman" panose="02020603050405020304" pitchFamily="18" charset="0"/>
                 <a:cs typeface="Times New Roman" panose="02020603050405020304" pitchFamily="18" charset="0"/>
               </a:rPr>
-              <a:t>Purpose of the Project</a:t>
+              <a:t>  Purpose of the Project</a:t>
             </a:r>
           </a:p>
         </p:txBody>
@@ -5068,36 +5157,92 @@
           <a:bodyPr/>
           <a:lstStyle/>
           <a:p>
+            <a:pPr marL="457200" indent="-317500">
+              <a:lnSpc>
+                <a:spcPct val="200000"/>
+              </a:lnSpc>
+              <a:buClr>
+                <a:srgbClr val="000000"/>
+              </a:buClr>
+              <a:buSzPts val="1400"/>
+              <a:buChar char="●"/>
+            </a:pPr>
             <a:r>
               <a:rPr lang="en-GB" sz="2000" dirty="0">
+                <a:solidFill>
+                  <a:srgbClr val="000000"/>
+                </a:solidFill>
                 <a:latin typeface="Times New Roman" panose="02020603050405020304" pitchFamily="18" charset="0"/>
+                <a:ea typeface="Calibri" panose="020F0502020204030204" pitchFamily="34" charset="0"/>
                 <a:cs typeface="Times New Roman" panose="02020603050405020304" pitchFamily="18" charset="0"/>
               </a:rPr>
               <a:t>Create an efficient platform for instant communications.</a:t>
             </a:r>
           </a:p>
           <a:p>
+            <a:pPr marL="457200" indent="-317500">
+              <a:lnSpc>
+                <a:spcPct val="200000"/>
+              </a:lnSpc>
+              <a:buClr>
+                <a:srgbClr val="000000"/>
+              </a:buClr>
+              <a:buSzPts val="1400"/>
+              <a:buChar char="●"/>
+            </a:pPr>
             <a:r>
               <a:rPr lang="en-GB" sz="2000" dirty="0">
+                <a:solidFill>
+                  <a:srgbClr val="000000"/>
+                </a:solidFill>
                 <a:latin typeface="Times New Roman" panose="02020603050405020304" pitchFamily="18" charset="0"/>
+                <a:ea typeface="Calibri" panose="020F0502020204030204" pitchFamily="34" charset="0"/>
                 <a:cs typeface="Times New Roman" panose="02020603050405020304" pitchFamily="18" charset="0"/>
               </a:rPr>
               <a:t>Make it possible for users to communicate using instant messages.</a:t>
             </a:r>
           </a:p>
           <a:p>
+            <a:pPr marL="457200" indent="-317500">
+              <a:lnSpc>
+                <a:spcPct val="200000"/>
+              </a:lnSpc>
+              <a:buClr>
+                <a:srgbClr val="000000"/>
+              </a:buClr>
+              <a:buSzPts val="1400"/>
+              <a:buChar char="●"/>
+            </a:pPr>
             <a:r>
               <a:rPr lang="en-GB" sz="2000" dirty="0">
+                <a:solidFill>
+                  <a:srgbClr val="000000"/>
+                </a:solidFill>
                 <a:latin typeface="Times New Roman" panose="02020603050405020304" pitchFamily="18" charset="0"/>
+                <a:ea typeface="Calibri" panose="020F0502020204030204" pitchFamily="34" charset="0"/>
                 <a:cs typeface="Times New Roman" panose="02020603050405020304" pitchFamily="18" charset="0"/>
               </a:rPr>
               <a:t>Allow users to share multimedia files (pictures, documents, videos).</a:t>
             </a:r>
           </a:p>
           <a:p>
+            <a:pPr marL="457200" indent="-317500">
+              <a:lnSpc>
+                <a:spcPct val="200000"/>
+              </a:lnSpc>
+              <a:buClr>
+                <a:srgbClr val="000000"/>
+              </a:buClr>
+              <a:buSzPts val="1400"/>
+              <a:buChar char="●"/>
+            </a:pPr>
             <a:r>
               <a:rPr lang="en-US" altLang="en-US" sz="2000" dirty="0">
+                <a:solidFill>
+                  <a:srgbClr val="000000"/>
+                </a:solidFill>
                 <a:latin typeface="Times New Roman" panose="02020603050405020304" pitchFamily="18" charset="0"/>
+                <a:ea typeface="Calibri" panose="020F0502020204030204" pitchFamily="34" charset="0"/>
                 <a:cs typeface="Times New Roman" panose="02020603050405020304" pitchFamily="18" charset="0"/>
                 <a:sym typeface="Arial" panose="020B0604020202020204" pitchFamily="34" charset="0"/>
               </a:rPr>
@@ -5105,31 +5250,67 @@
             </a:r>
             <a:r>
               <a:rPr lang="en-GB" sz="2000" dirty="0">
+                <a:solidFill>
+                  <a:srgbClr val="000000"/>
+                </a:solidFill>
                 <a:latin typeface="Times New Roman" panose="02020603050405020304" pitchFamily="18" charset="0"/>
+                <a:ea typeface="Calibri" panose="020F0502020204030204" pitchFamily="34" charset="0"/>
                 <a:cs typeface="Times New Roman" panose="02020603050405020304" pitchFamily="18" charset="0"/>
               </a:rPr>
               <a:t>technology.</a:t>
             </a:r>
           </a:p>
           <a:p>
+            <a:pPr marL="457200" indent="-317500">
+              <a:lnSpc>
+                <a:spcPct val="200000"/>
+              </a:lnSpc>
+              <a:buClr>
+                <a:srgbClr val="000000"/>
+              </a:buClr>
+              <a:buSzPts val="1400"/>
+              <a:buChar char="●"/>
+            </a:pPr>
             <a:r>
               <a:rPr lang="en-GB" sz="2000" dirty="0">
+                <a:solidFill>
+                  <a:srgbClr val="000000"/>
+                </a:solidFill>
                 <a:latin typeface="Times New Roman" panose="02020603050405020304" pitchFamily="18" charset="0"/>
+                <a:ea typeface="Calibri" panose="020F0502020204030204" pitchFamily="34" charset="0"/>
                 <a:cs typeface="Times New Roman" panose="02020603050405020304" pitchFamily="18" charset="0"/>
               </a:rPr>
               <a:t>Use a user-friendly design to make navigation easier.</a:t>
             </a:r>
           </a:p>
           <a:p>
+            <a:pPr marL="457200" indent="-317500">
+              <a:lnSpc>
+                <a:spcPct val="200000"/>
+              </a:lnSpc>
+              <a:buClr>
+                <a:srgbClr val="000000"/>
+              </a:buClr>
+              <a:buSzPts val="1400"/>
+              <a:buChar char="●"/>
+            </a:pPr>
             <a:r>
               <a:rPr lang="en-GB" sz="2000" dirty="0">
+                <a:solidFill>
+                  <a:srgbClr val="000000"/>
+                </a:solidFill>
                 <a:latin typeface="Times New Roman" panose="02020603050405020304" pitchFamily="18" charset="0"/>
+                <a:ea typeface="Calibri" panose="020F0502020204030204" pitchFamily="34" charset="0"/>
                 <a:cs typeface="Times New Roman" panose="02020603050405020304" pitchFamily="18" charset="0"/>
               </a:rPr>
               <a:t>Provide reliable means of communication with minimum latency.</a:t>
             </a:r>
             <a:endParaRPr lang="en-US" sz="2000" dirty="0">
+              <a:solidFill>
+                <a:srgbClr val="000000"/>
+              </a:solidFill>
               <a:latin typeface="Times New Roman" panose="02020603050405020304" pitchFamily="18" charset="0"/>
+              <a:ea typeface="Calibri" panose="020F0502020204030204" pitchFamily="34" charset="0"/>
               <a:cs typeface="Times New Roman" panose="02020603050405020304" pitchFamily="18" charset="0"/>
             </a:endParaRPr>
           </a:p>
@@ -5165,39 +5346,6 @@
           <a:chExt cx="0" cy="0"/>
         </a:xfrm>
       </p:grpSpPr>
-      <p:sp>
-        <p:nvSpPr>
-          <p:cNvPr id="2" name="Title 1">
-            <a:extLst>
-              <a:ext uri="{FF2B5EF4-FFF2-40B4-BE49-F238E27FC236}">
-                <a16:creationId xmlns:a16="http://schemas.microsoft.com/office/drawing/2014/main" id="{BC252AAF-E1DA-418A-B04E-190F8B308F0E}"/>
-              </a:ext>
-            </a:extLst>
-          </p:cNvPr>
-          <p:cNvSpPr>
-            <a:spLocks noGrp="1"/>
-          </p:cNvSpPr>
-          <p:nvPr>
-            <p:ph type="title"/>
-          </p:nvPr>
-        </p:nvSpPr>
-        <p:spPr/>
-        <p:txBody>
-          <a:bodyPr/>
-          <a:lstStyle/>
-          <a:p>
-            <a:pPr algn="ctr"/>
-            <a:r>
-              <a:rPr lang="en-US" b="1" dirty="0">
-                <a:latin typeface="Times New Roman" panose="02020603050405020304" pitchFamily="18" charset="0"/>
-                <a:cs typeface="Times New Roman" panose="02020603050405020304" pitchFamily="18" charset="0"/>
-              </a:rPr>
-              <a:t>Screen Shots</a:t>
-            </a:r>
-            <a:endParaRPr lang="en-US" dirty="0"/>
-          </a:p>
-        </p:txBody>
-      </p:sp>
       <p:pic>
         <p:nvPicPr>
           <p:cNvPr id="3" name="Picture 2">
@@ -5220,14 +5368,50 @@
         </p:blipFill>
         <p:spPr>
           <a:xfrm>
-            <a:off x="842442" y="1585655"/>
-            <a:ext cx="7459116" cy="3686689"/>
+            <a:off x="471726" y="1402428"/>
+            <a:ext cx="8200548" cy="4053144"/>
           </a:xfrm>
           <a:prstGeom prst="rect">
             <a:avLst/>
           </a:prstGeom>
         </p:spPr>
       </p:pic>
+      <p:sp>
+        <p:nvSpPr>
+          <p:cNvPr id="4" name="Title 1">
+            <a:extLst>
+              <a:ext uri="{FF2B5EF4-FFF2-40B4-BE49-F238E27FC236}">
+                <a16:creationId xmlns:a16="http://schemas.microsoft.com/office/drawing/2014/main" id="{D1423ACC-4370-A16A-4553-D434B9C35762}"/>
+              </a:ext>
+            </a:extLst>
+          </p:cNvPr>
+          <p:cNvSpPr>
+            <a:spLocks noGrp="1"/>
+          </p:cNvSpPr>
+          <p:nvPr>
+            <p:ph type="title"/>
+          </p:nvPr>
+        </p:nvSpPr>
+        <p:spPr>
+          <a:xfrm>
+            <a:off x="0" y="0"/>
+            <a:ext cx="5486400" cy="914400"/>
+          </a:xfrm>
+        </p:spPr>
+        <p:txBody>
+          <a:bodyPr/>
+          <a:lstStyle/>
+          <a:p>
+            <a:r>
+              <a:rPr lang="en-US" sz="3200" dirty="0">
+                <a:latin typeface="Times New Roman" panose="02020603050405020304" pitchFamily="18" charset="0"/>
+                <a:cs typeface="Times New Roman" panose="02020603050405020304" pitchFamily="18" charset="0"/>
+              </a:rPr>
+              <a:t>  Screenshots</a:t>
+            </a:r>
+          </a:p>
+        </p:txBody>
+      </p:sp>
     </p:spTree>
     <p:extLst>
       <p:ext uri="{BB962C8B-B14F-4D97-AF65-F5344CB8AC3E}">
@@ -5340,8 +5524,8 @@
         </p:blipFill>
         <p:spPr>
           <a:xfrm>
-            <a:off x="837679" y="1609471"/>
-            <a:ext cx="7468642" cy="3639058"/>
+            <a:off x="666563" y="1526095"/>
+            <a:ext cx="7810874" cy="3805809"/>
           </a:xfrm>
           <a:prstGeom prst="rect">
             <a:avLst/>
@@ -5400,8 +5584,8 @@
         </p:blipFill>
         <p:spPr>
           <a:xfrm>
-            <a:off x="823389" y="1661866"/>
-            <a:ext cx="7497221" cy="3534268"/>
+            <a:off x="709491" y="1608173"/>
+            <a:ext cx="7725018" cy="3641654"/>
           </a:xfrm>
           <a:prstGeom prst="rect">
             <a:avLst/>
@@ -6206,18 +6390,18 @@
 </file>
 
 <file path=customXml/item1.xml><?xml version="1.0" encoding="utf-8"?>
+<p:properties xmlns:p="http://schemas.microsoft.com/office/2006/metadata/properties" xmlns:xsi="http://www.w3.org/2001/XMLSchema-instance" xmlns:pc="http://schemas.microsoft.com/office/infopath/2007/PartnerControls">
+  <documentManagement/>
+</p:properties>
+</file>
+
+<file path=customXml/item2.xml><?xml version="1.0" encoding="utf-8"?>
 <?mso-contentType ?>
 <FormTemplates xmlns="http://schemas.microsoft.com/sharepoint/v3/contenttype/forms">
   <Display>DocumentLibraryForm</Display>
   <Edit>DocumentLibraryForm</Edit>
   <New>DocumentLibraryForm</New>
 </FormTemplates>
-</file>
-
-<file path=customXml/item2.xml><?xml version="1.0" encoding="utf-8"?>
-<p:properties xmlns:p="http://schemas.microsoft.com/office/2006/metadata/properties" xmlns:xsi="http://www.w3.org/2001/XMLSchema-instance" xmlns:pc="http://schemas.microsoft.com/office/infopath/2007/PartnerControls">
-  <documentManagement/>
-</p:properties>
 </file>
 
 <file path=customXml/item3.xml><?xml version="1.0" encoding="utf-8"?>
@@ -6335,14 +6519,6 @@
 </file>
 
 <file path=customXml/itemProps1.xml><?xml version="1.0" encoding="utf-8"?>
-<ds:datastoreItem xmlns:ds="http://schemas.openxmlformats.org/officeDocument/2006/customXml" ds:itemID="{737ED6F0-5E4C-4CD0-9B68-9C53F925A6F7}">
-  <ds:schemaRefs>
-    <ds:schemaRef ds:uri="http://schemas.microsoft.com/sharepoint/v3/contenttype/forms"/>
-  </ds:schemaRefs>
-</ds:datastoreItem>
-</file>
-
-<file path=customXml/itemProps2.xml><?xml version="1.0" encoding="utf-8"?>
 <ds:datastoreItem xmlns:ds="http://schemas.openxmlformats.org/officeDocument/2006/customXml" ds:itemID="{4A62A602-78C1-468C-BB25-57CD481DB741}">
   <ds:schemaRefs>
     <ds:schemaRef ds:uri="http://purl.org/dc/terms/"/>
@@ -6353,6 +6529,14 @@
     <ds:schemaRef ds:uri="http://purl.org/dc/elements/1.1/"/>
     <ds:schemaRef ds:uri="http://schemas.microsoft.com/office/infopath/2007/PartnerControls"/>
     <ds:schemaRef ds:uri="http://schemas.openxmlformats.org/package/2006/metadata/core-properties"/>
+  </ds:schemaRefs>
+</ds:datastoreItem>
+</file>
+
+<file path=customXml/itemProps2.xml><?xml version="1.0" encoding="utf-8"?>
+<ds:datastoreItem xmlns:ds="http://schemas.openxmlformats.org/officeDocument/2006/customXml" ds:itemID="{737ED6F0-5E4C-4CD0-9B68-9C53F925A6F7}">
+  <ds:schemaRefs>
+    <ds:schemaRef ds:uri="http://schemas.microsoft.com/sharepoint/v3/contenttype/forms"/>
   </ds:schemaRefs>
 </ds:datastoreItem>
 </file>
